--- a/mawang-night/RED_HOUR.pptx
+++ b/mawang-night/RED_HOUR.pptx
@@ -14205,54 +14205,7 @@
       </p:sp>
       <p:sp>
         <p:nvSpPr>
-          <p:cNvPr id="23" name="Rounded Rectangle 22"/>
-          <p:cNvSpPr/>
-          <p:nvPr/>
-        </p:nvSpPr>
-        <p:spPr>
-          <a:xfrm>
-            <a:off x="5664708" y="5532120"/>
-            <a:ext cx="4475988" cy="246887"/>
-          </a:xfrm>
-          <a:prstGeom prst="roundRect">
-            <a:avLst/>
-          </a:prstGeom>
-          <a:solidFill>
-            <a:srgbClr val="1F1012"/>
-          </a:solidFill>
-          <a:ln w="12700">
-            <a:solidFill>
-              <a:srgbClr val="332426"/>
-            </a:solidFill>
-            <a:prstDash val="dash"/>
-          </a:ln>
-          <a:effectLst/>
-        </p:spPr>
-        <p:style>
-          <a:lnRef idx="1">
-            <a:schemeClr val="accent1"/>
-          </a:lnRef>
-          <a:fillRef idx="3">
-            <a:schemeClr val="accent1"/>
-          </a:fillRef>
-          <a:effectRef idx="2">
-            <a:schemeClr val="accent1"/>
-          </a:effectRef>
-          <a:fontRef idx="minor">
-            <a:schemeClr val="lt1"/>
-          </a:fontRef>
-        </p:style>
-        <p:txBody>
-          <a:bodyPr rtlCol="0" anchor="ctr"/>
-          <a:lstStyle/>
-          <a:p>
-            <a:pPr algn="ctr"/>
-          </a:p>
-        </p:txBody>
-      </p:sp>
-      <p:sp>
-        <p:nvSpPr>
-          <p:cNvPr id="24" name="Rectangle 23"/>
+          <p:cNvPr id="23" name="Rectangle 22"/>
           <p:cNvSpPr/>
           <p:nvPr/>
         </p:nvSpPr>
@@ -14296,7 +14249,7 @@
       </p:sp>
       <p:sp>
         <p:nvSpPr>
-          <p:cNvPr id="25" name="TextBox 24"/>
+          <p:cNvPr id="24" name="TextBox 23"/>
           <p:cNvSpPr txBox="1"/>
           <p:nvPr/>
         </p:nvSpPr>
@@ -14344,7 +14297,7 @@
       </p:sp>
       <p:sp>
         <p:nvSpPr>
-          <p:cNvPr id="26" name="TextBox 25"/>
+          <p:cNvPr id="25" name="TextBox 24"/>
           <p:cNvSpPr txBox="1"/>
           <p:nvPr/>
         </p:nvSpPr>
@@ -17534,54 +17487,7 @@
       </p:sp>
       <p:sp>
         <p:nvSpPr>
-          <p:cNvPr id="23" name="Rounded Rectangle 22"/>
-          <p:cNvSpPr/>
-          <p:nvPr/>
-        </p:nvSpPr>
-        <p:spPr>
-          <a:xfrm>
-            <a:off x="5664708" y="5532120"/>
-            <a:ext cx="4475988" cy="246887"/>
-          </a:xfrm>
-          <a:prstGeom prst="roundRect">
-            <a:avLst/>
-          </a:prstGeom>
-          <a:solidFill>
-            <a:srgbClr val="1F1012"/>
-          </a:solidFill>
-          <a:ln w="12700">
-            <a:solidFill>
-              <a:srgbClr val="332426"/>
-            </a:solidFill>
-            <a:prstDash val="dash"/>
-          </a:ln>
-          <a:effectLst/>
-        </p:spPr>
-        <p:style>
-          <a:lnRef idx="1">
-            <a:schemeClr val="accent1"/>
-          </a:lnRef>
-          <a:fillRef idx="3">
-            <a:schemeClr val="accent1"/>
-          </a:fillRef>
-          <a:effectRef idx="2">
-            <a:schemeClr val="accent1"/>
-          </a:effectRef>
-          <a:fontRef idx="minor">
-            <a:schemeClr val="lt1"/>
-          </a:fontRef>
-        </p:style>
-        <p:txBody>
-          <a:bodyPr rtlCol="0" anchor="ctr"/>
-          <a:lstStyle/>
-          <a:p>
-            <a:pPr algn="ctr"/>
-          </a:p>
-        </p:txBody>
-      </p:sp>
-      <p:sp>
-        <p:nvSpPr>
-          <p:cNvPr id="24" name="Rectangle 23"/>
+          <p:cNvPr id="23" name="Rectangle 22"/>
           <p:cNvSpPr/>
           <p:nvPr/>
         </p:nvSpPr>
@@ -17625,7 +17531,7 @@
       </p:sp>
       <p:sp>
         <p:nvSpPr>
-          <p:cNvPr id="25" name="TextBox 24"/>
+          <p:cNvPr id="24" name="TextBox 23"/>
           <p:cNvSpPr txBox="1"/>
           <p:nvPr/>
         </p:nvSpPr>
@@ -17673,7 +17579,7 @@
       </p:sp>
       <p:sp>
         <p:nvSpPr>
-          <p:cNvPr id="26" name="TextBox 25"/>
+          <p:cNvPr id="25" name="TextBox 24"/>
           <p:cNvSpPr txBox="1"/>
           <p:nvPr/>
         </p:nvSpPr>
@@ -20118,52 +20024,1481 @@
           </a:p>
         </p:txBody>
       </p:sp>
-      <p:sp>
-        <p:nvSpPr>
-          <p:cNvPr id="8" name="Rounded Rectangle 7"/>
-          <p:cNvSpPr/>
-          <p:nvPr/>
-        </p:nvSpPr>
-        <p:spPr>
-          <a:xfrm>
-            <a:off x="914400" y="2194560"/>
-            <a:ext cx="9226296" cy="2377440"/>
-          </a:xfrm>
-          <a:prstGeom prst="roundRect">
-            <a:avLst/>
-          </a:prstGeom>
-          <a:solidFill>
-            <a:srgbClr val="1B1B1E"/>
-          </a:solidFill>
-          <a:ln w="9525">
-            <a:solidFill>
-              <a:srgbClr val="332426"/>
-            </a:solidFill>
-          </a:ln>
-          <a:effectLst/>
-        </p:spPr>
-        <p:style>
-          <a:lnRef idx="1">
-            <a:schemeClr val="accent1"/>
-          </a:lnRef>
-          <a:fillRef idx="3">
-            <a:schemeClr val="accent1"/>
-          </a:fillRef>
-          <a:effectRef idx="2">
-            <a:schemeClr val="accent1"/>
-          </a:effectRef>
-          <a:fontRef idx="minor">
-            <a:schemeClr val="lt1"/>
-          </a:fontRef>
-        </p:style>
-        <p:txBody>
-          <a:bodyPr rtlCol="0" anchor="ctr"/>
-          <a:lstStyle/>
-          <a:p>
-            <a:pPr algn="ctr"/>
-          </a:p>
-        </p:txBody>
-      </p:sp>
+      <p:graphicFrame>
+        <p:nvGraphicFramePr>
+          <p:cNvPr id="8" name="Table 7"/>
+          <p:cNvGraphicFramePr>
+            <a:graphicFrameLocks noGrp="1"/>
+          </p:cNvGraphicFramePr>
+          <p:nvPr/>
+        </p:nvGraphicFramePr>
+        <p:xfrm>
+          <a:off x="914400" y="1828800"/>
+          <a:ext cx="9226296" cy="3200400"/>
+        </p:xfrm>
+        <a:graphic>
+          <a:graphicData uri="http://schemas.openxmlformats.org/drawingml/2006/table">
+            <a:tbl>
+              <a:tblPr firstRow="1" bandRow="1">
+                <a:tableStyleId>{5C22544A-7EE6-4342-B048-85BDC9FD1C3A}</a:tableStyleId>
+              </a:tblPr>
+              <a:tblGrid>
+                <a:gridCol w="1188720"/>
+                <a:gridCol w="4206240"/>
+                <a:gridCol w="914400"/>
+                <a:gridCol w="914400"/>
+                <a:gridCol w="2002536"/>
+              </a:tblGrid>
+              <a:tr h="266700">
+                <a:tc>
+                  <a:txBody>
+                    <a:bodyPr wrap="square"/>
+                    <a:lstStyle/>
+                    <a:p>
+                      <a:pPr algn="l"/>
+                      <a:r>
+                        <a:rPr sz="1050" b="1" i="0">
+                          <a:solidFill>
+                            <a:srgbClr val="FFFFFF"/>
+                          </a:solidFill>
+                          <a:latin typeface="Pretendard"/>
+                          <a:ea typeface="Pretendard"/>
+                          <a:cs typeface="Pretendard"/>
+                        </a:rPr>
+                        <a:t>구분</a:t>
+                      </a:r>
+                    </a:p>
+                  </a:txBody>
+                  <a:tcPr marL="73152" marR="73152" marT="27432" marB="27432" anchor="ctr">
+                    <a:solidFill>
+                      <a:srgbClr val="C4141B"/>
+                    </a:solidFill>
+                  </a:tcPr>
+                </a:tc>
+                <a:tc>
+                  <a:txBody>
+                    <a:bodyPr wrap="square"/>
+                    <a:lstStyle/>
+                    <a:p>
+                      <a:pPr algn="l"/>
+                      <a:r>
+                        <a:rPr sz="1050" b="1" i="0">
+                          <a:solidFill>
+                            <a:srgbClr val="FFFFFF"/>
+                          </a:solidFill>
+                          <a:latin typeface="Pretendard"/>
+                          <a:ea typeface="Pretendard"/>
+                          <a:cs typeface="Pretendard"/>
+                        </a:rPr>
+                        <a:t>품목</a:t>
+                      </a:r>
+                    </a:p>
+                  </a:txBody>
+                  <a:tcPr marL="73152" marR="73152" marT="27432" marB="27432" anchor="ctr">
+                    <a:solidFill>
+                      <a:srgbClr val="C4141B"/>
+                    </a:solidFill>
+                  </a:tcPr>
+                </a:tc>
+                <a:tc>
+                  <a:txBody>
+                    <a:bodyPr wrap="square"/>
+                    <a:lstStyle/>
+                    <a:p>
+                      <a:pPr algn="r"/>
+                      <a:r>
+                        <a:rPr sz="1050" b="1" i="0">
+                          <a:solidFill>
+                            <a:srgbClr val="FFFFFF"/>
+                          </a:solidFill>
+                          <a:latin typeface="Pretendard"/>
+                          <a:ea typeface="Pretendard"/>
+                          <a:cs typeface="Pretendard"/>
+                        </a:rPr>
+                        <a:t>수량</a:t>
+                      </a:r>
+                    </a:p>
+                  </a:txBody>
+                  <a:tcPr marL="73152" marR="73152" marT="27432" marB="27432" anchor="ctr">
+                    <a:solidFill>
+                      <a:srgbClr val="C4141B"/>
+                    </a:solidFill>
+                  </a:tcPr>
+                </a:tc>
+                <a:tc>
+                  <a:txBody>
+                    <a:bodyPr wrap="square"/>
+                    <a:lstStyle/>
+                    <a:p>
+                      <a:pPr algn="r"/>
+                      <a:r>
+                        <a:rPr sz="1050" b="1" i="0">
+                          <a:solidFill>
+                            <a:srgbClr val="FFFFFF"/>
+                          </a:solidFill>
+                          <a:latin typeface="Pretendard"/>
+                          <a:ea typeface="Pretendard"/>
+                          <a:cs typeface="Pretendard"/>
+                        </a:rPr>
+                        <a:t>단가</a:t>
+                      </a:r>
+                    </a:p>
+                  </a:txBody>
+                  <a:tcPr marL="73152" marR="73152" marT="27432" marB="27432" anchor="ctr">
+                    <a:solidFill>
+                      <a:srgbClr val="C4141B"/>
+                    </a:solidFill>
+                  </a:tcPr>
+                </a:tc>
+                <a:tc>
+                  <a:txBody>
+                    <a:bodyPr wrap="square"/>
+                    <a:lstStyle/>
+                    <a:p>
+                      <a:pPr algn="r"/>
+                      <a:r>
+                        <a:rPr sz="1050" b="1" i="0">
+                          <a:solidFill>
+                            <a:srgbClr val="FFFFFF"/>
+                          </a:solidFill>
+                          <a:latin typeface="Pretendard"/>
+                          <a:ea typeface="Pretendard"/>
+                          <a:cs typeface="Pretendard"/>
+                        </a:rPr>
+                        <a:t>공급가액</a:t>
+                      </a:r>
+                    </a:p>
+                  </a:txBody>
+                  <a:tcPr marL="73152" marR="73152" marT="27432" marB="27432" anchor="ctr">
+                    <a:solidFill>
+                      <a:srgbClr val="C4141B"/>
+                    </a:solidFill>
+                  </a:tcPr>
+                </a:tc>
+              </a:tr>
+              <a:tr h="266700">
+                <a:tc rowSpan="6">
+                  <a:txBody>
+                    <a:bodyPr wrap="square"/>
+                    <a:lstStyle/>
+                    <a:p>
+                      <a:pPr algn="l"/>
+                      <a:r>
+                        <a:rPr sz="900" b="1" i="0">
+                          <a:solidFill>
+                            <a:srgbClr val="F4F0E8"/>
+                          </a:solidFill>
+                          <a:latin typeface="Pretendard"/>
+                          <a:ea typeface="Pretendard"/>
+                          <a:cs typeface="Pretendard"/>
+                        </a:rPr>
+                        <a:t>미조립형</a:t>
+                      </a:r>
+                      <a:r>
+                        <a:rPr sz="950" b="1" i="0">
+                          <a:solidFill>
+                            <a:srgbClr val="F4F0E8"/>
+                          </a:solidFill>
+                          <a:latin typeface="Pretendard"/>
+                          <a:ea typeface="Pretendard"/>
+                          <a:cs typeface="Pretendard"/>
+                        </a:rPr>
+                        <a:t>미조립형
+(보드+키캡)</a:t>
+                      </a:r>
+                    </a:p>
+                  </a:txBody>
+                  <a:tcPr marL="73152" marR="73152" marT="27432" marB="27432" anchor="ctr">
+                    <a:solidFill>
+                      <a:srgbClr val="1B1B1E"/>
+                    </a:solidFill>
+                  </a:tcPr>
+                </a:tc>
+                <a:tc>
+                  <a:txBody>
+                    <a:bodyPr wrap="square"/>
+                    <a:lstStyle/>
+                    <a:p>
+                      <a:pPr algn="l"/>
+                      <a:r>
+                        <a:rPr sz="900" b="0" i="0">
+                          <a:solidFill>
+                            <a:srgbClr val="9C9AA0"/>
+                          </a:solidFill>
+                          <a:latin typeface="Pretendard"/>
+                          <a:ea typeface="Pretendard"/>
+                          <a:cs typeface="Pretendard"/>
+                        </a:rPr>
+                        <a:t>1구 보드(LED)+개별 PVC케이스</a:t>
+                      </a:r>
+                    </a:p>
+                  </a:txBody>
+                  <a:tcPr marL="73152" marR="73152" marT="27432" marB="27432" anchor="ctr">
+                    <a:solidFill>
+                      <a:srgbClr val="151518"/>
+                    </a:solidFill>
+                  </a:tcPr>
+                </a:tc>
+                <a:tc>
+                  <a:txBody>
+                    <a:bodyPr wrap="square"/>
+                    <a:lstStyle/>
+                    <a:p>
+                      <a:pPr algn="r"/>
+                      <a:r>
+                        <a:rPr sz="900" b="0" i="0">
+                          <a:solidFill>
+                            <a:srgbClr val="9C9AA0"/>
+                          </a:solidFill>
+                          <a:latin typeface="Pretendard"/>
+                          <a:ea typeface="Pretendard"/>
+                          <a:cs typeface="Pretendard"/>
+                        </a:rPr>
+                        <a:t>1,000</a:t>
+                      </a:r>
+                    </a:p>
+                  </a:txBody>
+                  <a:tcPr marL="73152" marR="73152" marT="27432" marB="27432" anchor="ctr">
+                    <a:solidFill>
+                      <a:srgbClr val="151518"/>
+                    </a:solidFill>
+                  </a:tcPr>
+                </a:tc>
+                <a:tc>
+                  <a:txBody>
+                    <a:bodyPr wrap="square"/>
+                    <a:lstStyle/>
+                    <a:p>
+                      <a:pPr algn="r"/>
+                      <a:r>
+                        <a:rPr sz="900" b="0" i="0">
+                          <a:solidFill>
+                            <a:srgbClr val="9C9AA0"/>
+                          </a:solidFill>
+                          <a:latin typeface="Pretendard"/>
+                          <a:ea typeface="Pretendard"/>
+                          <a:cs typeface="Pretendard"/>
+                        </a:rPr>
+                        <a:t>1,700</a:t>
+                      </a:r>
+                    </a:p>
+                  </a:txBody>
+                  <a:tcPr marL="73152" marR="73152" marT="27432" marB="27432" anchor="ctr">
+                    <a:solidFill>
+                      <a:srgbClr val="151518"/>
+                    </a:solidFill>
+                  </a:tcPr>
+                </a:tc>
+                <a:tc>
+                  <a:txBody>
+                    <a:bodyPr wrap="square"/>
+                    <a:lstStyle/>
+                    <a:p>
+                      <a:pPr algn="r"/>
+                      <a:r>
+                        <a:rPr sz="900" b="0" i="0">
+                          <a:solidFill>
+                            <a:srgbClr val="9C9AA0"/>
+                          </a:solidFill>
+                          <a:latin typeface="Pretendard"/>
+                          <a:ea typeface="Pretendard"/>
+                          <a:cs typeface="Pretendard"/>
+                        </a:rPr>
+                        <a:t>1,700,000</a:t>
+                      </a:r>
+                    </a:p>
+                  </a:txBody>
+                  <a:tcPr marL="73152" marR="73152" marT="27432" marB="27432" anchor="ctr">
+                    <a:solidFill>
+                      <a:srgbClr val="151518"/>
+                    </a:solidFill>
+                  </a:tcPr>
+                </a:tc>
+              </a:tr>
+              <a:tr h="266700">
+                <a:tc vMerge="1">
+                  <a:txBody>
+                    <a:bodyPr wrap="square"/>
+                    <a:lstStyle/>
+                    <a:p>
+                      <a:pPr algn="l"/>
+                      <a:r>
+                        <a:rPr sz="900" b="1" i="0">
+                          <a:solidFill>
+                            <a:srgbClr val="F4F0E8"/>
+                          </a:solidFill>
+                          <a:latin typeface="Pretendard"/>
+                          <a:ea typeface="Pretendard"/>
+                          <a:cs typeface="Pretendard"/>
+                        </a:rPr>
+                        <a:t/>
+                      </a:r>
+                    </a:p>
+                  </a:txBody>
+                  <a:tcPr marL="73152" marR="73152" marT="27432" marB="27432" anchor="ctr">
+                    <a:solidFill>
+                      <a:srgbClr val="151518"/>
+                    </a:solidFill>
+                  </a:tcPr>
+                </a:tc>
+                <a:tc>
+                  <a:txBody>
+                    <a:bodyPr wrap="square"/>
+                    <a:lstStyle/>
+                    <a:p>
+                      <a:pPr algn="l"/>
+                      <a:r>
+                        <a:rPr sz="900" b="0" i="0">
+                          <a:solidFill>
+                            <a:srgbClr val="9C9AA0"/>
+                          </a:solidFill>
+                          <a:latin typeface="Pretendard"/>
+                          <a:ea typeface="Pretendard"/>
+                          <a:cs typeface="Pretendard"/>
+                        </a:rPr>
+                        <a:t>키캡 (4종×250)/미조립</a:t>
+                      </a:r>
+                    </a:p>
+                  </a:txBody>
+                  <a:tcPr marL="73152" marR="73152" marT="27432" marB="27432" anchor="ctr">
+                    <a:solidFill>
+                      <a:srgbClr val="151518"/>
+                    </a:solidFill>
+                  </a:tcPr>
+                </a:tc>
+                <a:tc>
+                  <a:txBody>
+                    <a:bodyPr wrap="square"/>
+                    <a:lstStyle/>
+                    <a:p>
+                      <a:pPr algn="r"/>
+                      <a:r>
+                        <a:rPr sz="900" b="0" i="0">
+                          <a:solidFill>
+                            <a:srgbClr val="9C9AA0"/>
+                          </a:solidFill>
+                          <a:latin typeface="Pretendard"/>
+                          <a:ea typeface="Pretendard"/>
+                          <a:cs typeface="Pretendard"/>
+                        </a:rPr>
+                        <a:t>1,000</a:t>
+                      </a:r>
+                    </a:p>
+                  </a:txBody>
+                  <a:tcPr marL="73152" marR="73152" marT="27432" marB="27432" anchor="ctr">
+                    <a:solidFill>
+                      <a:srgbClr val="151518"/>
+                    </a:solidFill>
+                  </a:tcPr>
+                </a:tc>
+                <a:tc>
+                  <a:txBody>
+                    <a:bodyPr wrap="square"/>
+                    <a:lstStyle/>
+                    <a:p>
+                      <a:pPr algn="r"/>
+                      <a:r>
+                        <a:rPr sz="900" b="0" i="0">
+                          <a:solidFill>
+                            <a:srgbClr val="9C9AA0"/>
+                          </a:solidFill>
+                          <a:latin typeface="Pretendard"/>
+                          <a:ea typeface="Pretendard"/>
+                          <a:cs typeface="Pretendard"/>
+                        </a:rPr>
+                        <a:t>1,000</a:t>
+                      </a:r>
+                    </a:p>
+                  </a:txBody>
+                  <a:tcPr marL="73152" marR="73152" marT="27432" marB="27432" anchor="ctr">
+                    <a:solidFill>
+                      <a:srgbClr val="151518"/>
+                    </a:solidFill>
+                  </a:tcPr>
+                </a:tc>
+                <a:tc>
+                  <a:txBody>
+                    <a:bodyPr wrap="square"/>
+                    <a:lstStyle/>
+                    <a:p>
+                      <a:pPr algn="r"/>
+                      <a:r>
+                        <a:rPr sz="900" b="0" i="0">
+                          <a:solidFill>
+                            <a:srgbClr val="9C9AA0"/>
+                          </a:solidFill>
+                          <a:latin typeface="Pretendard"/>
+                          <a:ea typeface="Pretendard"/>
+                          <a:cs typeface="Pretendard"/>
+                        </a:rPr>
+                        <a:t>1,000,000</a:t>
+                      </a:r>
+                    </a:p>
+                  </a:txBody>
+                  <a:tcPr marL="73152" marR="73152" marT="27432" marB="27432" anchor="ctr">
+                    <a:solidFill>
+                      <a:srgbClr val="151518"/>
+                    </a:solidFill>
+                  </a:tcPr>
+                </a:tc>
+              </a:tr>
+              <a:tr h="266700">
+                <a:tc vMerge="1">
+                  <a:txBody>
+                    <a:bodyPr wrap="square"/>
+                    <a:lstStyle/>
+                    <a:p>
+                      <a:pPr algn="l"/>
+                      <a:r>
+                        <a:rPr sz="900" b="1" i="0">
+                          <a:solidFill>
+                            <a:srgbClr val="F4F0E8"/>
+                          </a:solidFill>
+                          <a:latin typeface="Pretendard"/>
+                          <a:ea typeface="Pretendard"/>
+                          <a:cs typeface="Pretendard"/>
+                        </a:rPr>
+                        <a:t/>
+                      </a:r>
+                    </a:p>
+                  </a:txBody>
+                  <a:tcPr marL="73152" marR="73152" marT="27432" marB="27432" anchor="ctr">
+                    <a:solidFill>
+                      <a:srgbClr val="151518"/>
+                    </a:solidFill>
+                  </a:tcPr>
+                </a:tc>
+                <a:tc>
+                  <a:txBody>
+                    <a:bodyPr wrap="square"/>
+                    <a:lstStyle/>
+                    <a:p>
+                      <a:pPr algn="l"/>
+                      <a:r>
+                        <a:rPr sz="900" b="0" i="0">
+                          <a:solidFill>
+                            <a:srgbClr val="9C9AA0"/>
+                          </a:solidFill>
+                          <a:latin typeface="Pretendard"/>
+                          <a:ea typeface="Pretendard"/>
+                          <a:cs typeface="Pretendard"/>
+                        </a:rPr>
+                        <a:t>2구 보드(LED)+개별 PVC케이스</a:t>
+                      </a:r>
+                    </a:p>
+                  </a:txBody>
+                  <a:tcPr marL="73152" marR="73152" marT="27432" marB="27432" anchor="ctr">
+                    <a:solidFill>
+                      <a:srgbClr val="151518"/>
+                    </a:solidFill>
+                  </a:tcPr>
+                </a:tc>
+                <a:tc>
+                  <a:txBody>
+                    <a:bodyPr wrap="square"/>
+                    <a:lstStyle/>
+                    <a:p>
+                      <a:pPr algn="r"/>
+                      <a:r>
+                        <a:rPr sz="900" b="0" i="0">
+                          <a:solidFill>
+                            <a:srgbClr val="9C9AA0"/>
+                          </a:solidFill>
+                          <a:latin typeface="Pretendard"/>
+                          <a:ea typeface="Pretendard"/>
+                          <a:cs typeface="Pretendard"/>
+                        </a:rPr>
+                        <a:t>1,000</a:t>
+                      </a:r>
+                    </a:p>
+                  </a:txBody>
+                  <a:tcPr marL="73152" marR="73152" marT="27432" marB="27432" anchor="ctr">
+                    <a:solidFill>
+                      <a:srgbClr val="151518"/>
+                    </a:solidFill>
+                  </a:tcPr>
+                </a:tc>
+                <a:tc>
+                  <a:txBody>
+                    <a:bodyPr wrap="square"/>
+                    <a:lstStyle/>
+                    <a:p>
+                      <a:pPr algn="r"/>
+                      <a:r>
+                        <a:rPr sz="900" b="0" i="0">
+                          <a:solidFill>
+                            <a:srgbClr val="9C9AA0"/>
+                          </a:solidFill>
+                          <a:latin typeface="Pretendard"/>
+                          <a:ea typeface="Pretendard"/>
+                          <a:cs typeface="Pretendard"/>
+                        </a:rPr>
+                        <a:t>2,300</a:t>
+                      </a:r>
+                    </a:p>
+                  </a:txBody>
+                  <a:tcPr marL="73152" marR="73152" marT="27432" marB="27432" anchor="ctr">
+                    <a:solidFill>
+                      <a:srgbClr val="151518"/>
+                    </a:solidFill>
+                  </a:tcPr>
+                </a:tc>
+                <a:tc>
+                  <a:txBody>
+                    <a:bodyPr wrap="square"/>
+                    <a:lstStyle/>
+                    <a:p>
+                      <a:pPr algn="r"/>
+                      <a:r>
+                        <a:rPr sz="900" b="0" i="0">
+                          <a:solidFill>
+                            <a:srgbClr val="9C9AA0"/>
+                          </a:solidFill>
+                          <a:latin typeface="Pretendard"/>
+                          <a:ea typeface="Pretendard"/>
+                          <a:cs typeface="Pretendard"/>
+                        </a:rPr>
+                        <a:t>2,300,000</a:t>
+                      </a:r>
+                    </a:p>
+                  </a:txBody>
+                  <a:tcPr marL="73152" marR="73152" marT="27432" marB="27432" anchor="ctr">
+                    <a:solidFill>
+                      <a:srgbClr val="151518"/>
+                    </a:solidFill>
+                  </a:tcPr>
+                </a:tc>
+              </a:tr>
+              <a:tr h="266700">
+                <a:tc vMerge="1">
+                  <a:txBody>
+                    <a:bodyPr wrap="square"/>
+                    <a:lstStyle/>
+                    <a:p>
+                      <a:pPr algn="l"/>
+                      <a:r>
+                        <a:rPr sz="900" b="1" i="0">
+                          <a:solidFill>
+                            <a:srgbClr val="F4F0E8"/>
+                          </a:solidFill>
+                          <a:latin typeface="Pretendard"/>
+                          <a:ea typeface="Pretendard"/>
+                          <a:cs typeface="Pretendard"/>
+                        </a:rPr>
+                        <a:t/>
+                      </a:r>
+                    </a:p>
+                  </a:txBody>
+                  <a:tcPr marL="73152" marR="73152" marT="27432" marB="27432" anchor="ctr">
+                    <a:solidFill>
+                      <a:srgbClr val="151518"/>
+                    </a:solidFill>
+                  </a:tcPr>
+                </a:tc>
+                <a:tc>
+                  <a:txBody>
+                    <a:bodyPr wrap="square"/>
+                    <a:lstStyle/>
+                    <a:p>
+                      <a:pPr algn="l"/>
+                      <a:r>
+                        <a:rPr sz="900" b="0" i="0">
+                          <a:solidFill>
+                            <a:srgbClr val="9C9AA0"/>
+                          </a:solidFill>
+                          <a:latin typeface="Pretendard"/>
+                          <a:ea typeface="Pretendard"/>
+                          <a:cs typeface="Pretendard"/>
+                        </a:rPr>
+                        <a:t>키캡 (4종×500)/미조립</a:t>
+                      </a:r>
+                    </a:p>
+                  </a:txBody>
+                  <a:tcPr marL="73152" marR="73152" marT="27432" marB="27432" anchor="ctr">
+                    <a:solidFill>
+                      <a:srgbClr val="151518"/>
+                    </a:solidFill>
+                  </a:tcPr>
+                </a:tc>
+                <a:tc>
+                  <a:txBody>
+                    <a:bodyPr wrap="square"/>
+                    <a:lstStyle/>
+                    <a:p>
+                      <a:pPr algn="r"/>
+                      <a:r>
+                        <a:rPr sz="900" b="0" i="0">
+                          <a:solidFill>
+                            <a:srgbClr val="9C9AA0"/>
+                          </a:solidFill>
+                          <a:latin typeface="Pretendard"/>
+                          <a:ea typeface="Pretendard"/>
+                          <a:cs typeface="Pretendard"/>
+                        </a:rPr>
+                        <a:t>2,000</a:t>
+                      </a:r>
+                    </a:p>
+                  </a:txBody>
+                  <a:tcPr marL="73152" marR="73152" marT="27432" marB="27432" anchor="ctr">
+                    <a:solidFill>
+                      <a:srgbClr val="151518"/>
+                    </a:solidFill>
+                  </a:tcPr>
+                </a:tc>
+                <a:tc>
+                  <a:txBody>
+                    <a:bodyPr wrap="square"/>
+                    <a:lstStyle/>
+                    <a:p>
+                      <a:pPr algn="r"/>
+                      <a:r>
+                        <a:rPr sz="900" b="0" i="0">
+                          <a:solidFill>
+                            <a:srgbClr val="9C9AA0"/>
+                          </a:solidFill>
+                          <a:latin typeface="Pretendard"/>
+                          <a:ea typeface="Pretendard"/>
+                          <a:cs typeface="Pretendard"/>
+                        </a:rPr>
+                        <a:t>900</a:t>
+                      </a:r>
+                    </a:p>
+                  </a:txBody>
+                  <a:tcPr marL="73152" marR="73152" marT="27432" marB="27432" anchor="ctr">
+                    <a:solidFill>
+                      <a:srgbClr val="151518"/>
+                    </a:solidFill>
+                  </a:tcPr>
+                </a:tc>
+                <a:tc>
+                  <a:txBody>
+                    <a:bodyPr wrap="square"/>
+                    <a:lstStyle/>
+                    <a:p>
+                      <a:pPr algn="r"/>
+                      <a:r>
+                        <a:rPr sz="900" b="0" i="0">
+                          <a:solidFill>
+                            <a:srgbClr val="9C9AA0"/>
+                          </a:solidFill>
+                          <a:latin typeface="Pretendard"/>
+                          <a:ea typeface="Pretendard"/>
+                          <a:cs typeface="Pretendard"/>
+                        </a:rPr>
+                        <a:t>1,800,000</a:t>
+                      </a:r>
+                    </a:p>
+                  </a:txBody>
+                  <a:tcPr marL="73152" marR="73152" marT="27432" marB="27432" anchor="ctr">
+                    <a:solidFill>
+                      <a:srgbClr val="151518"/>
+                    </a:solidFill>
+                  </a:tcPr>
+                </a:tc>
+              </a:tr>
+              <a:tr h="266700">
+                <a:tc vMerge="1">
+                  <a:txBody>
+                    <a:bodyPr wrap="square"/>
+                    <a:lstStyle/>
+                    <a:p>
+                      <a:pPr algn="l"/>
+                      <a:r>
+                        <a:rPr sz="900" b="1" i="0">
+                          <a:solidFill>
+                            <a:srgbClr val="F4F0E8"/>
+                          </a:solidFill>
+                          <a:latin typeface="Pretendard"/>
+                          <a:ea typeface="Pretendard"/>
+                          <a:cs typeface="Pretendard"/>
+                        </a:rPr>
+                        <a:t/>
+                      </a:r>
+                    </a:p>
+                  </a:txBody>
+                  <a:tcPr marL="73152" marR="73152" marT="27432" marB="27432" anchor="ctr">
+                    <a:solidFill>
+                      <a:srgbClr val="151518"/>
+                    </a:solidFill>
+                  </a:tcPr>
+                </a:tc>
+                <a:tc>
+                  <a:txBody>
+                    <a:bodyPr wrap="square"/>
+                    <a:lstStyle/>
+                    <a:p>
+                      <a:pPr algn="l"/>
+                      <a:r>
+                        <a:rPr sz="900" b="0" i="0">
+                          <a:solidFill>
+                            <a:srgbClr val="9C9AA0"/>
+                          </a:solidFill>
+                          <a:latin typeface="Pretendard"/>
+                          <a:ea typeface="Pretendard"/>
+                          <a:cs typeface="Pretendard"/>
+                        </a:rPr>
+                        <a:t>3구 보드(LED)+개별 PVC케이스</a:t>
+                      </a:r>
+                    </a:p>
+                  </a:txBody>
+                  <a:tcPr marL="73152" marR="73152" marT="27432" marB="27432" anchor="ctr">
+                    <a:solidFill>
+                      <a:srgbClr val="151518"/>
+                    </a:solidFill>
+                  </a:tcPr>
+                </a:tc>
+                <a:tc>
+                  <a:txBody>
+                    <a:bodyPr wrap="square"/>
+                    <a:lstStyle/>
+                    <a:p>
+                      <a:pPr algn="r"/>
+                      <a:r>
+                        <a:rPr sz="900" b="0" i="0">
+                          <a:solidFill>
+                            <a:srgbClr val="9C9AA0"/>
+                          </a:solidFill>
+                          <a:latin typeface="Pretendard"/>
+                          <a:ea typeface="Pretendard"/>
+                          <a:cs typeface="Pretendard"/>
+                        </a:rPr>
+                        <a:t>1,000</a:t>
+                      </a:r>
+                    </a:p>
+                  </a:txBody>
+                  <a:tcPr marL="73152" marR="73152" marT="27432" marB="27432" anchor="ctr">
+                    <a:solidFill>
+                      <a:srgbClr val="151518"/>
+                    </a:solidFill>
+                  </a:tcPr>
+                </a:tc>
+                <a:tc>
+                  <a:txBody>
+                    <a:bodyPr wrap="square"/>
+                    <a:lstStyle/>
+                    <a:p>
+                      <a:pPr algn="r"/>
+                      <a:r>
+                        <a:rPr sz="900" b="0" i="0">
+                          <a:solidFill>
+                            <a:srgbClr val="9C9AA0"/>
+                          </a:solidFill>
+                          <a:latin typeface="Pretendard"/>
+                          <a:ea typeface="Pretendard"/>
+                          <a:cs typeface="Pretendard"/>
+                        </a:rPr>
+                        <a:t>3,000</a:t>
+                      </a:r>
+                    </a:p>
+                  </a:txBody>
+                  <a:tcPr marL="73152" marR="73152" marT="27432" marB="27432" anchor="ctr">
+                    <a:solidFill>
+                      <a:srgbClr val="151518"/>
+                    </a:solidFill>
+                  </a:tcPr>
+                </a:tc>
+                <a:tc>
+                  <a:txBody>
+                    <a:bodyPr wrap="square"/>
+                    <a:lstStyle/>
+                    <a:p>
+                      <a:pPr algn="r"/>
+                      <a:r>
+                        <a:rPr sz="900" b="0" i="0">
+                          <a:solidFill>
+                            <a:srgbClr val="9C9AA0"/>
+                          </a:solidFill>
+                          <a:latin typeface="Pretendard"/>
+                          <a:ea typeface="Pretendard"/>
+                          <a:cs typeface="Pretendard"/>
+                        </a:rPr>
+                        <a:t>3,000,000</a:t>
+                      </a:r>
+                    </a:p>
+                  </a:txBody>
+                  <a:tcPr marL="73152" marR="73152" marT="27432" marB="27432" anchor="ctr">
+                    <a:solidFill>
+                      <a:srgbClr val="151518"/>
+                    </a:solidFill>
+                  </a:tcPr>
+                </a:tc>
+              </a:tr>
+              <a:tr h="266700">
+                <a:tc vMerge="1">
+                  <a:txBody>
+                    <a:bodyPr wrap="square"/>
+                    <a:lstStyle/>
+                    <a:p>
+                      <a:pPr algn="l"/>
+                      <a:r>
+                        <a:rPr sz="900" b="1" i="0">
+                          <a:solidFill>
+                            <a:srgbClr val="F4F0E8"/>
+                          </a:solidFill>
+                          <a:latin typeface="Pretendard"/>
+                          <a:ea typeface="Pretendard"/>
+                          <a:cs typeface="Pretendard"/>
+                        </a:rPr>
+                        <a:t/>
+                      </a:r>
+                    </a:p>
+                  </a:txBody>
+                  <a:tcPr marL="73152" marR="73152" marT="27432" marB="27432" anchor="ctr">
+                    <a:solidFill>
+                      <a:srgbClr val="151518"/>
+                    </a:solidFill>
+                  </a:tcPr>
+                </a:tc>
+                <a:tc>
+                  <a:txBody>
+                    <a:bodyPr wrap="square"/>
+                    <a:lstStyle/>
+                    <a:p>
+                      <a:pPr algn="l"/>
+                      <a:r>
+                        <a:rPr sz="900" b="0" i="0">
+                          <a:solidFill>
+                            <a:srgbClr val="9C9AA0"/>
+                          </a:solidFill>
+                          <a:latin typeface="Pretendard"/>
+                          <a:ea typeface="Pretendard"/>
+                          <a:cs typeface="Pretendard"/>
+                        </a:rPr>
+                        <a:t>키캡 (4종×750)/미조립</a:t>
+                      </a:r>
+                    </a:p>
+                  </a:txBody>
+                  <a:tcPr marL="73152" marR="73152" marT="27432" marB="27432" anchor="ctr">
+                    <a:solidFill>
+                      <a:srgbClr val="151518"/>
+                    </a:solidFill>
+                  </a:tcPr>
+                </a:tc>
+                <a:tc>
+                  <a:txBody>
+                    <a:bodyPr wrap="square"/>
+                    <a:lstStyle/>
+                    <a:p>
+                      <a:pPr algn="r"/>
+                      <a:r>
+                        <a:rPr sz="900" b="0" i="0">
+                          <a:solidFill>
+                            <a:srgbClr val="9C9AA0"/>
+                          </a:solidFill>
+                          <a:latin typeface="Pretendard"/>
+                          <a:ea typeface="Pretendard"/>
+                          <a:cs typeface="Pretendard"/>
+                        </a:rPr>
+                        <a:t>3,000</a:t>
+                      </a:r>
+                    </a:p>
+                  </a:txBody>
+                  <a:tcPr marL="73152" marR="73152" marT="27432" marB="27432" anchor="ctr">
+                    <a:solidFill>
+                      <a:srgbClr val="151518"/>
+                    </a:solidFill>
+                  </a:tcPr>
+                </a:tc>
+                <a:tc>
+                  <a:txBody>
+                    <a:bodyPr wrap="square"/>
+                    <a:lstStyle/>
+                    <a:p>
+                      <a:pPr algn="r"/>
+                      <a:r>
+                        <a:rPr sz="900" b="0" i="0">
+                          <a:solidFill>
+                            <a:srgbClr val="9C9AA0"/>
+                          </a:solidFill>
+                          <a:latin typeface="Pretendard"/>
+                          <a:ea typeface="Pretendard"/>
+                          <a:cs typeface="Pretendard"/>
+                        </a:rPr>
+                        <a:t>850</a:t>
+                      </a:r>
+                    </a:p>
+                  </a:txBody>
+                  <a:tcPr marL="73152" marR="73152" marT="27432" marB="27432" anchor="ctr">
+                    <a:solidFill>
+                      <a:srgbClr val="151518"/>
+                    </a:solidFill>
+                  </a:tcPr>
+                </a:tc>
+                <a:tc>
+                  <a:txBody>
+                    <a:bodyPr wrap="square"/>
+                    <a:lstStyle/>
+                    <a:p>
+                      <a:pPr algn="r"/>
+                      <a:r>
+                        <a:rPr sz="900" b="0" i="0">
+                          <a:solidFill>
+                            <a:srgbClr val="9C9AA0"/>
+                          </a:solidFill>
+                          <a:latin typeface="Pretendard"/>
+                          <a:ea typeface="Pretendard"/>
+                          <a:cs typeface="Pretendard"/>
+                        </a:rPr>
+                        <a:t>2,550,000</a:t>
+                      </a:r>
+                    </a:p>
+                  </a:txBody>
+                  <a:tcPr marL="73152" marR="73152" marT="27432" marB="27432" anchor="ctr">
+                    <a:solidFill>
+                      <a:srgbClr val="151518"/>
+                    </a:solidFill>
+                  </a:tcPr>
+                </a:tc>
+              </a:tr>
+              <a:tr h="266700">
+                <a:tc rowSpan="3">
+                  <a:txBody>
+                    <a:bodyPr wrap="square"/>
+                    <a:lstStyle/>
+                    <a:p>
+                      <a:pPr algn="l"/>
+                      <a:r>
+                        <a:rPr sz="900" b="1" i="0">
+                          <a:solidFill>
+                            <a:srgbClr val="F4F0E8"/>
+                          </a:solidFill>
+                          <a:latin typeface="Pretendard"/>
+                          <a:ea typeface="Pretendard"/>
+                          <a:cs typeface="Pretendard"/>
+                        </a:rPr>
+                        <a:t>완성형</a:t>
+                      </a:r>
+                      <a:r>
+                        <a:rPr sz="950" b="1" i="0">
+                          <a:solidFill>
+                            <a:srgbClr val="F4F0E8"/>
+                          </a:solidFill>
+                          <a:latin typeface="Pretendard"/>
+                          <a:ea typeface="Pretendard"/>
+                          <a:cs typeface="Pretendard"/>
+                        </a:rPr>
+                        <a:t>완성형
+(키링 LED·OPP)</a:t>
+                      </a:r>
+                    </a:p>
+                  </a:txBody>
+                  <a:tcPr marL="73152" marR="73152" marT="27432" marB="27432" anchor="ctr">
+                    <a:solidFill>
+                      <a:srgbClr val="1B1B1E"/>
+                    </a:solidFill>
+                  </a:tcPr>
+                </a:tc>
+                <a:tc>
+                  <a:txBody>
+                    <a:bodyPr wrap="square"/>
+                    <a:lstStyle/>
+                    <a:p>
+                      <a:pPr algn="l"/>
+                      <a:r>
+                        <a:rPr sz="900" b="0" i="0">
+                          <a:solidFill>
+                            <a:srgbClr val="9C9AA0"/>
+                          </a:solidFill>
+                          <a:latin typeface="Pretendard"/>
+                          <a:ea typeface="Pretendard"/>
+                          <a:cs typeface="Pretendard"/>
+                        </a:rPr>
+                        <a:t>1구 키캡키링(LED)/OPP (4종×250)</a:t>
+                      </a:r>
+                    </a:p>
+                  </a:txBody>
+                  <a:tcPr marL="73152" marR="73152" marT="27432" marB="27432" anchor="ctr">
+                    <a:solidFill>
+                      <a:srgbClr val="151518"/>
+                    </a:solidFill>
+                  </a:tcPr>
+                </a:tc>
+                <a:tc>
+                  <a:txBody>
+                    <a:bodyPr wrap="square"/>
+                    <a:lstStyle/>
+                    <a:p>
+                      <a:pPr algn="r"/>
+                      <a:r>
+                        <a:rPr sz="900" b="0" i="0">
+                          <a:solidFill>
+                            <a:srgbClr val="9C9AA0"/>
+                          </a:solidFill>
+                          <a:latin typeface="Pretendard"/>
+                          <a:ea typeface="Pretendard"/>
+                          <a:cs typeface="Pretendard"/>
+                        </a:rPr>
+                        <a:t>1,000</a:t>
+                      </a:r>
+                    </a:p>
+                  </a:txBody>
+                  <a:tcPr marL="73152" marR="73152" marT="27432" marB="27432" anchor="ctr">
+                    <a:solidFill>
+                      <a:srgbClr val="151518"/>
+                    </a:solidFill>
+                  </a:tcPr>
+                </a:tc>
+                <a:tc>
+                  <a:txBody>
+                    <a:bodyPr wrap="square"/>
+                    <a:lstStyle/>
+                    <a:p>
+                      <a:pPr algn="r"/>
+                      <a:r>
+                        <a:rPr sz="900" b="0" i="0">
+                          <a:solidFill>
+                            <a:srgbClr val="9C9AA0"/>
+                          </a:solidFill>
+                          <a:latin typeface="Pretendard"/>
+                          <a:ea typeface="Pretendard"/>
+                          <a:cs typeface="Pretendard"/>
+                        </a:rPr>
+                        <a:t>2,400</a:t>
+                      </a:r>
+                    </a:p>
+                  </a:txBody>
+                  <a:tcPr marL="73152" marR="73152" marT="27432" marB="27432" anchor="ctr">
+                    <a:solidFill>
+                      <a:srgbClr val="151518"/>
+                    </a:solidFill>
+                  </a:tcPr>
+                </a:tc>
+                <a:tc>
+                  <a:txBody>
+                    <a:bodyPr wrap="square"/>
+                    <a:lstStyle/>
+                    <a:p>
+                      <a:pPr algn="r"/>
+                      <a:r>
+                        <a:rPr sz="900" b="0" i="0">
+                          <a:solidFill>
+                            <a:srgbClr val="9C9AA0"/>
+                          </a:solidFill>
+                          <a:latin typeface="Pretendard"/>
+                          <a:ea typeface="Pretendard"/>
+                          <a:cs typeface="Pretendard"/>
+                        </a:rPr>
+                        <a:t>2,400,000</a:t>
+                      </a:r>
+                    </a:p>
+                  </a:txBody>
+                  <a:tcPr marL="73152" marR="73152" marT="27432" marB="27432" anchor="ctr">
+                    <a:solidFill>
+                      <a:srgbClr val="151518"/>
+                    </a:solidFill>
+                  </a:tcPr>
+                </a:tc>
+              </a:tr>
+              <a:tr h="266700">
+                <a:tc vMerge="1">
+                  <a:txBody>
+                    <a:bodyPr wrap="square"/>
+                    <a:lstStyle/>
+                    <a:p>
+                      <a:pPr algn="l"/>
+                      <a:r>
+                        <a:rPr sz="900" b="1" i="0">
+                          <a:solidFill>
+                            <a:srgbClr val="F4F0E8"/>
+                          </a:solidFill>
+                          <a:latin typeface="Pretendard"/>
+                          <a:ea typeface="Pretendard"/>
+                          <a:cs typeface="Pretendard"/>
+                        </a:rPr>
+                        <a:t/>
+                      </a:r>
+                    </a:p>
+                  </a:txBody>
+                  <a:tcPr marL="73152" marR="73152" marT="27432" marB="27432" anchor="ctr">
+                    <a:solidFill>
+                      <a:srgbClr val="151518"/>
+                    </a:solidFill>
+                  </a:tcPr>
+                </a:tc>
+                <a:tc>
+                  <a:txBody>
+                    <a:bodyPr wrap="square"/>
+                    <a:lstStyle/>
+                    <a:p>
+                      <a:pPr algn="l"/>
+                      <a:r>
+                        <a:rPr sz="900" b="0" i="0">
+                          <a:solidFill>
+                            <a:srgbClr val="9C9AA0"/>
+                          </a:solidFill>
+                          <a:latin typeface="Pretendard"/>
+                          <a:ea typeface="Pretendard"/>
+                          <a:cs typeface="Pretendard"/>
+                        </a:rPr>
+                        <a:t>2구 키캡키링(LED)/OPP (4종×500)</a:t>
+                      </a:r>
+                    </a:p>
+                  </a:txBody>
+                  <a:tcPr marL="73152" marR="73152" marT="27432" marB="27432" anchor="ctr">
+                    <a:solidFill>
+                      <a:srgbClr val="151518"/>
+                    </a:solidFill>
+                  </a:tcPr>
+                </a:tc>
+                <a:tc>
+                  <a:txBody>
+                    <a:bodyPr wrap="square"/>
+                    <a:lstStyle/>
+                    <a:p>
+                      <a:pPr algn="r"/>
+                      <a:r>
+                        <a:rPr sz="900" b="0" i="0">
+                          <a:solidFill>
+                            <a:srgbClr val="9C9AA0"/>
+                          </a:solidFill>
+                          <a:latin typeface="Pretendard"/>
+                          <a:ea typeface="Pretendard"/>
+                          <a:cs typeface="Pretendard"/>
+                        </a:rPr>
+                        <a:t>1,000</a:t>
+                      </a:r>
+                    </a:p>
+                  </a:txBody>
+                  <a:tcPr marL="73152" marR="73152" marT="27432" marB="27432" anchor="ctr">
+                    <a:solidFill>
+                      <a:srgbClr val="151518"/>
+                    </a:solidFill>
+                  </a:tcPr>
+                </a:tc>
+                <a:tc>
+                  <a:txBody>
+                    <a:bodyPr wrap="square"/>
+                    <a:lstStyle/>
+                    <a:p>
+                      <a:pPr algn="r"/>
+                      <a:r>
+                        <a:rPr sz="900" b="0" i="0">
+                          <a:solidFill>
+                            <a:srgbClr val="9C9AA0"/>
+                          </a:solidFill>
+                          <a:latin typeface="Pretendard"/>
+                          <a:ea typeface="Pretendard"/>
+                          <a:cs typeface="Pretendard"/>
+                        </a:rPr>
+                        <a:t>4,000</a:t>
+                      </a:r>
+                    </a:p>
+                  </a:txBody>
+                  <a:tcPr marL="73152" marR="73152" marT="27432" marB="27432" anchor="ctr">
+                    <a:solidFill>
+                      <a:srgbClr val="151518"/>
+                    </a:solidFill>
+                  </a:tcPr>
+                </a:tc>
+                <a:tc>
+                  <a:txBody>
+                    <a:bodyPr wrap="square"/>
+                    <a:lstStyle/>
+                    <a:p>
+                      <a:pPr algn="r"/>
+                      <a:r>
+                        <a:rPr sz="900" b="0" i="0">
+                          <a:solidFill>
+                            <a:srgbClr val="9C9AA0"/>
+                          </a:solidFill>
+                          <a:latin typeface="Pretendard"/>
+                          <a:ea typeface="Pretendard"/>
+                          <a:cs typeface="Pretendard"/>
+                        </a:rPr>
+                        <a:t>4,000,000</a:t>
+                      </a:r>
+                    </a:p>
+                  </a:txBody>
+                  <a:tcPr marL="73152" marR="73152" marT="27432" marB="27432" anchor="ctr">
+                    <a:solidFill>
+                      <a:srgbClr val="151518"/>
+                    </a:solidFill>
+                  </a:tcPr>
+                </a:tc>
+              </a:tr>
+              <a:tr h="266700">
+                <a:tc vMerge="1">
+                  <a:txBody>
+                    <a:bodyPr wrap="square"/>
+                    <a:lstStyle/>
+                    <a:p>
+                      <a:pPr algn="l"/>
+                      <a:r>
+                        <a:rPr sz="900" b="1" i="0">
+                          <a:solidFill>
+                            <a:srgbClr val="F4F0E8"/>
+                          </a:solidFill>
+                          <a:latin typeface="Pretendard"/>
+                          <a:ea typeface="Pretendard"/>
+                          <a:cs typeface="Pretendard"/>
+                        </a:rPr>
+                        <a:t/>
+                      </a:r>
+                    </a:p>
+                  </a:txBody>
+                  <a:tcPr marL="73152" marR="73152" marT="27432" marB="27432" anchor="ctr">
+                    <a:solidFill>
+                      <a:srgbClr val="151518"/>
+                    </a:solidFill>
+                  </a:tcPr>
+                </a:tc>
+                <a:tc>
+                  <a:txBody>
+                    <a:bodyPr wrap="square"/>
+                    <a:lstStyle/>
+                    <a:p>
+                      <a:pPr algn="l"/>
+                      <a:r>
+                        <a:rPr sz="900" b="0" i="0">
+                          <a:solidFill>
+                            <a:srgbClr val="9C9AA0"/>
+                          </a:solidFill>
+                          <a:latin typeface="Pretendard"/>
+                          <a:ea typeface="Pretendard"/>
+                          <a:cs typeface="Pretendard"/>
+                        </a:rPr>
+                        <a:t>3구 키캡키링(LED)/OPP (4종×750)</a:t>
+                      </a:r>
+                    </a:p>
+                  </a:txBody>
+                  <a:tcPr marL="73152" marR="73152" marT="27432" marB="27432" anchor="ctr">
+                    <a:solidFill>
+                      <a:srgbClr val="151518"/>
+                    </a:solidFill>
+                  </a:tcPr>
+                </a:tc>
+                <a:tc>
+                  <a:txBody>
+                    <a:bodyPr wrap="square"/>
+                    <a:lstStyle/>
+                    <a:p>
+                      <a:pPr algn="r"/>
+                      <a:r>
+                        <a:rPr sz="900" b="0" i="0">
+                          <a:solidFill>
+                            <a:srgbClr val="9C9AA0"/>
+                          </a:solidFill>
+                          <a:latin typeface="Pretendard"/>
+                          <a:ea typeface="Pretendard"/>
+                          <a:cs typeface="Pretendard"/>
+                        </a:rPr>
+                        <a:t>1,000</a:t>
+                      </a:r>
+                    </a:p>
+                  </a:txBody>
+                  <a:tcPr marL="73152" marR="73152" marT="27432" marB="27432" anchor="ctr">
+                    <a:solidFill>
+                      <a:srgbClr val="151518"/>
+                    </a:solidFill>
+                  </a:tcPr>
+                </a:tc>
+                <a:tc>
+                  <a:txBody>
+                    <a:bodyPr wrap="square"/>
+                    <a:lstStyle/>
+                    <a:p>
+                      <a:pPr algn="r"/>
+                      <a:r>
+                        <a:rPr sz="900" b="0" i="0">
+                          <a:solidFill>
+                            <a:srgbClr val="9C9AA0"/>
+                          </a:solidFill>
+                          <a:latin typeface="Pretendard"/>
+                          <a:ea typeface="Pretendard"/>
+                          <a:cs typeface="Pretendard"/>
+                        </a:rPr>
+                        <a:t>5,500</a:t>
+                      </a:r>
+                    </a:p>
+                  </a:txBody>
+                  <a:tcPr marL="73152" marR="73152" marT="27432" marB="27432" anchor="ctr">
+                    <a:solidFill>
+                      <a:srgbClr val="151518"/>
+                    </a:solidFill>
+                  </a:tcPr>
+                </a:tc>
+                <a:tc>
+                  <a:txBody>
+                    <a:bodyPr wrap="square"/>
+                    <a:lstStyle/>
+                    <a:p>
+                      <a:pPr algn="r"/>
+                      <a:r>
+                        <a:rPr sz="900" b="0" i="0">
+                          <a:solidFill>
+                            <a:srgbClr val="9C9AA0"/>
+                          </a:solidFill>
+                          <a:latin typeface="Pretendard"/>
+                          <a:ea typeface="Pretendard"/>
+                          <a:cs typeface="Pretendard"/>
+                        </a:rPr>
+                        <a:t>5,500,000</a:t>
+                      </a:r>
+                    </a:p>
+                  </a:txBody>
+                  <a:tcPr marL="73152" marR="73152" marT="27432" marB="27432" anchor="ctr">
+                    <a:solidFill>
+                      <a:srgbClr val="151518"/>
+                    </a:solidFill>
+                  </a:tcPr>
+                </a:tc>
+              </a:tr>
+              <a:tr h="266700">
+                <a:tc gridSpan="2">
+                  <a:txBody>
+                    <a:bodyPr wrap="square"/>
+                    <a:lstStyle/>
+                    <a:p>
+                      <a:pPr algn="l"/>
+                      <a:r>
+                        <a:rPr sz="1000" b="1" i="0">
+                          <a:solidFill>
+                            <a:srgbClr val="F4F0E8"/>
+                          </a:solidFill>
+                          <a:latin typeface="Pretendard"/>
+                          <a:ea typeface="Pretendard"/>
+                          <a:cs typeface="Pretendard"/>
+                        </a:rPr>
+                        <a:t>미조립형 총금액 (VAT 포함)</a:t>
+                      </a:r>
+                    </a:p>
+                  </a:txBody>
+                  <a:tcPr marL="73152" marR="73152" marT="27432" marB="27432" anchor="ctr">
+                    <a:solidFill>
+                      <a:srgbClr val="1F1012"/>
+                    </a:solidFill>
+                  </a:tcPr>
+                </a:tc>
+                <a:tc hMerge="1">
+                  <a:txBody>
+                    <a:bodyPr/>
+                    <a:lstStyle/>
+                    <a:p/>
+                  </a:txBody>
+                  <a:tcPr/>
+                </a:tc>
+                <a:tc gridSpan="3">
+                  <a:txBody>
+                    <a:bodyPr wrap="square"/>
+                    <a:lstStyle/>
+                    <a:p>
+                      <a:pPr algn="r"/>
+                      <a:r>
+                        <a:rPr sz="1000" b="1" i="0">
+                          <a:solidFill>
+                            <a:srgbClr val="F4F0E8"/>
+                          </a:solidFill>
+                          <a:latin typeface="Pretendard"/>
+                          <a:ea typeface="Pretendard"/>
+                          <a:cs typeface="Pretendard"/>
+                        </a:rPr>
+                        <a:t>1구 2,970,000 · 2구 4,510,000 · 3구 6,105,000</a:t>
+                      </a:r>
+                    </a:p>
+                  </a:txBody>
+                  <a:tcPr marL="73152" marR="73152" marT="27432" marB="27432" anchor="ctr">
+                    <a:solidFill>
+                      <a:srgbClr val="1F1012"/>
+                    </a:solidFill>
+                  </a:tcPr>
+                </a:tc>
+                <a:tc hMerge="1">
+                  <a:txBody>
+                    <a:bodyPr/>
+                    <a:lstStyle/>
+                    <a:p/>
+                  </a:txBody>
+                  <a:tcPr/>
+                </a:tc>
+                <a:tc hMerge="1">
+                  <a:txBody>
+                    <a:bodyPr/>
+                    <a:lstStyle/>
+                    <a:p/>
+                  </a:txBody>
+                  <a:tcPr/>
+                </a:tc>
+              </a:tr>
+              <a:tr h="266700">
+                <a:tc gridSpan="2">
+                  <a:txBody>
+                    <a:bodyPr wrap="square"/>
+                    <a:lstStyle/>
+                    <a:p>
+                      <a:pPr algn="l"/>
+                      <a:r>
+                        <a:rPr sz="1000" b="1" i="0">
+                          <a:solidFill>
+                            <a:srgbClr val="F4F0E8"/>
+                          </a:solidFill>
+                          <a:latin typeface="Pretendard"/>
+                          <a:ea typeface="Pretendard"/>
+                          <a:cs typeface="Pretendard"/>
+                        </a:rPr>
+                        <a:t>완성형 총금액 (VAT 포함)</a:t>
+                      </a:r>
+                    </a:p>
+                  </a:txBody>
+                  <a:tcPr marL="73152" marR="73152" marT="27432" marB="27432" anchor="ctr">
+                    <a:solidFill>
+                      <a:srgbClr val="1F1012"/>
+                    </a:solidFill>
+                  </a:tcPr>
+                </a:tc>
+                <a:tc hMerge="1">
+                  <a:txBody>
+                    <a:bodyPr/>
+                    <a:lstStyle/>
+                    <a:p/>
+                  </a:txBody>
+                  <a:tcPr/>
+                </a:tc>
+                <a:tc gridSpan="3">
+                  <a:txBody>
+                    <a:bodyPr wrap="square"/>
+                    <a:lstStyle/>
+                    <a:p>
+                      <a:pPr algn="r"/>
+                      <a:r>
+                        <a:rPr sz="1000" b="1" i="0">
+                          <a:solidFill>
+                            <a:srgbClr val="F4F0E8"/>
+                          </a:solidFill>
+                          <a:latin typeface="Pretendard"/>
+                          <a:ea typeface="Pretendard"/>
+                          <a:cs typeface="Pretendard"/>
+                        </a:rPr>
+                        <a:t>1구 2,640,000 · 2구 4,400,000 · 3구 6,050,000</a:t>
+                      </a:r>
+                    </a:p>
+                  </a:txBody>
+                  <a:tcPr marL="73152" marR="73152" marT="27432" marB="27432" anchor="ctr">
+                    <a:solidFill>
+                      <a:srgbClr val="1F1012"/>
+                    </a:solidFill>
+                  </a:tcPr>
+                </a:tc>
+                <a:tc hMerge="1">
+                  <a:txBody>
+                    <a:bodyPr/>
+                    <a:lstStyle/>
+                    <a:p/>
+                  </a:txBody>
+                  <a:tcPr/>
+                </a:tc>
+                <a:tc hMerge="1">
+                  <a:txBody>
+                    <a:bodyPr/>
+                    <a:lstStyle/>
+                    <a:p/>
+                  </a:txBody>
+                  <a:tcPr/>
+                </a:tc>
+              </a:tr>
+            </a:tbl>
+          </a:graphicData>
+        </a:graphic>
+      </p:graphicFrame>
       <p:sp>
         <p:nvSpPr>
           <p:cNvPr id="9" name="TextBox 8"/>
@@ -20172,81 +21507,7 @@
         </p:nvSpPr>
         <p:spPr>
           <a:xfrm>
-            <a:off x="1188720" y="2194560"/>
-            <a:ext cx="8677656" cy="2377440"/>
-          </a:xfrm>
-          <a:prstGeom prst="rect">
-            <a:avLst/>
-          </a:prstGeom>
-          <a:noFill/>
-        </p:spPr>
-        <p:txBody>
-          <a:bodyPr wrap="square" anchor="ctr" lIns="0" rIns="0" tIns="0" bIns="0">
-            <a:spAutoFit/>
-          </a:bodyPr>
-          <a:lstStyle/>
-          <a:p>
-            <a:pPr algn="ctr">
-              <a:lnSpc>
-                <a:spcPct val="140000"/>
-              </a:lnSpc>
-              <a:spcBef>
-                <a:spcPts val="0"/>
-              </a:spcBef>
-              <a:spcAft>
-                <a:spcPts val="200"/>
-              </a:spcAft>
-              <a:buNone/>
-            </a:pPr>
-            <a:r>
-              <a:rPr sz="1300" b="0" i="0">
-                <a:solidFill>
-                  <a:srgbClr val="9C9AA0"/>
-                </a:solidFill>
-                <a:latin typeface="Pretendard"/>
-                <a:ea typeface="Pretendard"/>
-                <a:cs typeface="Pretendard"/>
-              </a:rPr>
-              <a:t>브랜다즐 견적서(PDF) 수신 시 — 뉴리디파인과 동일한 표 형식으로
-품목·수량·단가·금액을 반영합니다.</a:t>
-            </a:r>
-          </a:p>
-          <a:p>
-            <a:pPr algn="ctr">
-              <a:lnSpc>
-                <a:spcPct val="100000"/>
-              </a:lnSpc>
-              <a:spcBef>
-                <a:spcPts val="800"/>
-              </a:spcBef>
-              <a:spcAft>
-                <a:spcPts val="200"/>
-              </a:spcAft>
-              <a:buNone/>
-            </a:pPr>
-            <a:r>
-              <a:rPr sz="1000" b="0" i="0">
-                <a:solidFill>
-                  <a:srgbClr val="6C6A70"/>
-                </a:solidFill>
-                <a:latin typeface="Pretendard"/>
-                <a:ea typeface="Pretendard"/>
-                <a:cs typeface="Pretendard"/>
-              </a:rPr>
-              <a:t>문의: cs@brandazzle.kr · brandazzle.kr</a:t>
-            </a:r>
-          </a:p>
-        </p:txBody>
-      </p:sp>
-      <p:sp>
-        <p:nvSpPr>
-          <p:cNvPr id="10" name="TextBox 9"/>
-          <p:cNvSpPr txBox="1"/>
-          <p:nvPr/>
-        </p:nvSpPr>
-        <p:spPr>
-          <a:xfrm>
-            <a:off x="914400" y="4846320"/>
+            <a:off x="914400" y="5257800"/>
             <a:ext cx="9226296" cy="1005840"/>
           </a:xfrm>
           <a:prstGeom prst="rect">
@@ -20273,7 +21534,7 @@
               <a:buNone/>
             </a:pPr>
             <a:r>
-              <a:rPr sz="1100" b="0" i="0">
+              <a:rPr sz="950" b="0" i="0">
                 <a:solidFill>
                   <a:srgbClr val="9C9AA0"/>
                 </a:solidFill>
@@ -20281,14 +21542,14 @@
                 <a:ea typeface="Pretendard"/>
                 <a:cs typeface="Pretendard"/>
               </a:rPr>
-              <a:t>※ 브랜다즐 견적서 재첨부 시 본 슬라이드에 정식 수치 반영 예정. 두 업체 견적을 나란히 비교해 발주처를 결정.</a:t>
-            </a:r>
-          </a:p>
-        </p:txBody>
-      </p:sp>
-      <p:sp>
-        <p:nvSpPr>
-          <p:cNvPr id="11" name="Rectangle 10"/>
+              <a:t>비고 · 공급가액 VAT별도(합계 VAT포함) · OPP+made in china 부착 · 견적 영업일 기준 2주 유효 · 결제 발주 후 100%(협의가능) · 발주·디자인파일 영업일 4~5주 · 공급: 주식회사 에이블러(brandazzle_cs@brandazzle.kr)</a:t>
+            </a:r>
+          </a:p>
+        </p:txBody>
+      </p:sp>
+      <p:sp>
+        <p:nvSpPr>
+          <p:cNvPr id="10" name="Rectangle 9"/>
           <p:cNvSpPr/>
           <p:nvPr/>
         </p:nvSpPr>
@@ -20332,7 +21593,7 @@
       </p:sp>
       <p:sp>
         <p:nvSpPr>
-          <p:cNvPr id="12" name="TextBox 11"/>
+          <p:cNvPr id="11" name="TextBox 10"/>
           <p:cNvSpPr txBox="1"/>
           <p:nvPr/>
         </p:nvSpPr>
@@ -20380,7 +21641,7 @@
       </p:sp>
       <p:sp>
         <p:nvSpPr>
-          <p:cNvPr id="13" name="TextBox 12"/>
+          <p:cNvPr id="12" name="TextBox 11"/>
           <p:cNvSpPr txBox="1"/>
           <p:nvPr/>
         </p:nvSpPr>
@@ -23197,199 +24458,67 @@
           </a:p>
         </p:txBody>
       </p:sp>
-      <p:sp>
-        <p:nvSpPr>
-          <p:cNvPr id="15" name="Rounded Rectangle 14"/>
-          <p:cNvSpPr/>
-          <p:nvPr/>
-        </p:nvSpPr>
-        <p:spPr>
-          <a:xfrm>
-            <a:off x="914400" y="4709160"/>
-            <a:ext cx="4521708" cy="1097280"/>
-          </a:xfrm>
-          <a:prstGeom prst="roundRect">
-            <a:avLst/>
-          </a:prstGeom>
-          <a:solidFill>
-            <a:srgbClr val="1F1012"/>
-          </a:solidFill>
-          <a:ln w="12700">
+      <p:pic>
+        <p:nvPicPr>
+          <p:cNvPr id="15" name="Picture 14" descr="venue_lowkey_a.jpg"/>
+          <p:cNvPicPr>
+            <a:picLocks noChangeAspect="1"/>
+          </p:cNvPicPr>
+          <p:nvPr/>
+        </p:nvPicPr>
+        <p:blipFill>
+          <a:blip r:embed="rId2"/>
+          <a:stretch>
+            <a:fillRect/>
+          </a:stretch>
+        </p:blipFill>
+        <p:spPr>
+          <a:xfrm>
+            <a:off x="914400" y="4617720"/>
+            <a:ext cx="4521708" cy="1234440"/>
+          </a:xfrm>
+          <a:prstGeom prst="rect">
+            <a:avLst/>
+          </a:prstGeom>
+          <a:ln w="9525">
             <a:solidFill>
               <a:srgbClr val="332426"/>
             </a:solidFill>
-            <a:prstDash val="dash"/>
           </a:ln>
-          <a:effectLst/>
-        </p:spPr>
-        <p:style>
-          <a:lnRef idx="1">
-            <a:schemeClr val="accent1"/>
-          </a:lnRef>
-          <a:fillRef idx="3">
-            <a:schemeClr val="accent1"/>
-          </a:fillRef>
-          <a:effectRef idx="2">
-            <a:schemeClr val="accent1"/>
-          </a:effectRef>
-          <a:fontRef idx="minor">
-            <a:schemeClr val="lt1"/>
-          </a:fontRef>
-        </p:style>
-        <p:txBody>
-          <a:bodyPr rtlCol="0" anchor="ctr"/>
-          <a:lstStyle/>
-          <a:p>
-            <a:pPr algn="ctr"/>
-          </a:p>
-        </p:txBody>
-      </p:sp>
-      <p:sp>
-        <p:nvSpPr>
-          <p:cNvPr id="16" name="TextBox 15"/>
-          <p:cNvSpPr txBox="1"/>
-          <p:nvPr/>
-        </p:nvSpPr>
-        <p:spPr>
-          <a:xfrm>
-            <a:off x="914400" y="4709160"/>
-            <a:ext cx="4521708" cy="1097280"/>
+        </p:spPr>
+      </p:pic>
+      <p:pic>
+        <p:nvPicPr>
+          <p:cNvPr id="16" name="Picture 15" descr="venue_adult_a.jpg"/>
+          <p:cNvPicPr>
+            <a:picLocks noChangeAspect="1"/>
+          </p:cNvPicPr>
+          <p:nvPr/>
+        </p:nvPicPr>
+        <p:blipFill>
+          <a:blip r:embed="rId3"/>
+          <a:stretch>
+            <a:fillRect/>
+          </a:stretch>
+        </p:blipFill>
+        <p:spPr>
+          <a:xfrm>
+            <a:off x="5618988" y="4617720"/>
+            <a:ext cx="4521708" cy="1234440"/>
           </a:xfrm>
           <a:prstGeom prst="rect">
             <a:avLst/>
           </a:prstGeom>
-          <a:noFill/>
-        </p:spPr>
-        <p:txBody>
-          <a:bodyPr wrap="square" anchor="ctr" lIns="0" rIns="0" tIns="0" bIns="0">
-            <a:spAutoFit/>
-          </a:bodyPr>
-          <a:lstStyle/>
-          <a:p>
-            <a:pPr algn="ctr">
-              <a:lnSpc>
-                <a:spcPct val="100000"/>
-              </a:lnSpc>
-              <a:spcBef>
-                <a:spcPts val="0"/>
-              </a:spcBef>
-              <a:spcAft>
-                <a:spcPts val="200"/>
-              </a:spcAft>
-              <a:buNone/>
-            </a:pPr>
-            <a:r>
-              <a:rPr sz="950" b="0" i="0">
-                <a:solidFill>
-                  <a:srgbClr val="6C6A70"/>
-                </a:solidFill>
-                <a:latin typeface="Pretendard"/>
-                <a:ea typeface="Pretendard"/>
-                <a:cs typeface="Pretendard"/>
-              </a:rPr>
-              <a:t>🖼  공간 레퍼런스 사진 · 삽입 영역</a:t>
-            </a:r>
-          </a:p>
-        </p:txBody>
-      </p:sp>
-      <p:sp>
-        <p:nvSpPr>
-          <p:cNvPr id="17" name="Rounded Rectangle 16"/>
-          <p:cNvSpPr/>
-          <p:nvPr/>
-        </p:nvSpPr>
-        <p:spPr>
-          <a:xfrm>
-            <a:off x="5618988" y="4709160"/>
-            <a:ext cx="4521708" cy="1097280"/>
-          </a:xfrm>
-          <a:prstGeom prst="roundRect">
-            <a:avLst/>
-          </a:prstGeom>
-          <a:solidFill>
-            <a:srgbClr val="1F1012"/>
-          </a:solidFill>
-          <a:ln w="12700">
+          <a:ln w="9525">
             <a:solidFill>
               <a:srgbClr val="332426"/>
             </a:solidFill>
-            <a:prstDash val="dash"/>
           </a:ln>
-          <a:effectLst/>
-        </p:spPr>
-        <p:style>
-          <a:lnRef idx="1">
-            <a:schemeClr val="accent1"/>
-          </a:lnRef>
-          <a:fillRef idx="3">
-            <a:schemeClr val="accent1"/>
-          </a:fillRef>
-          <a:effectRef idx="2">
-            <a:schemeClr val="accent1"/>
-          </a:effectRef>
-          <a:fontRef idx="minor">
-            <a:schemeClr val="lt1"/>
-          </a:fontRef>
-        </p:style>
-        <p:txBody>
-          <a:bodyPr rtlCol="0" anchor="ctr"/>
-          <a:lstStyle/>
-          <a:p>
-            <a:pPr algn="ctr"/>
-          </a:p>
-        </p:txBody>
-      </p:sp>
-      <p:sp>
-        <p:nvSpPr>
-          <p:cNvPr id="18" name="TextBox 17"/>
-          <p:cNvSpPr txBox="1"/>
-          <p:nvPr/>
-        </p:nvSpPr>
-        <p:spPr>
-          <a:xfrm>
-            <a:off x="5618988" y="4709160"/>
-            <a:ext cx="4521708" cy="1097280"/>
-          </a:xfrm>
-          <a:prstGeom prst="rect">
-            <a:avLst/>
-          </a:prstGeom>
-          <a:noFill/>
-        </p:spPr>
-        <p:txBody>
-          <a:bodyPr wrap="square" anchor="ctr" lIns="0" rIns="0" tIns="0" bIns="0">
-            <a:spAutoFit/>
-          </a:bodyPr>
-          <a:lstStyle/>
-          <a:p>
-            <a:pPr algn="ctr">
-              <a:lnSpc>
-                <a:spcPct val="100000"/>
-              </a:lnSpc>
-              <a:spcBef>
-                <a:spcPts val="0"/>
-              </a:spcBef>
-              <a:spcAft>
-                <a:spcPts val="200"/>
-              </a:spcAft>
-              <a:buNone/>
-            </a:pPr>
-            <a:r>
-              <a:rPr sz="950" b="0" i="0">
-                <a:solidFill>
-                  <a:srgbClr val="6C6A70"/>
-                </a:solidFill>
-                <a:latin typeface="Pretendard"/>
-                <a:ea typeface="Pretendard"/>
-                <a:cs typeface="Pretendard"/>
-              </a:rPr>
-              <a:t>🖼  레드 연출 무드컷 · 삽입 영역</a:t>
-            </a:r>
-          </a:p>
-        </p:txBody>
-      </p:sp>
-      <p:sp>
-        <p:nvSpPr>
-          <p:cNvPr id="19" name="Rectangle 18"/>
+        </p:spPr>
+      </p:pic>
+      <p:sp>
+        <p:nvSpPr>
+          <p:cNvPr id="17" name="Rectangle 16"/>
           <p:cNvSpPr/>
           <p:nvPr/>
         </p:nvSpPr>
@@ -23433,7 +24562,7 @@
       </p:sp>
       <p:sp>
         <p:nvSpPr>
-          <p:cNvPr id="20" name="TextBox 19"/>
+          <p:cNvPr id="18" name="TextBox 17"/>
           <p:cNvSpPr txBox="1"/>
           <p:nvPr/>
         </p:nvSpPr>
@@ -23481,7 +24610,7 @@
       </p:sp>
       <p:sp>
         <p:nvSpPr>
-          <p:cNvPr id="21" name="TextBox 20"/>
+          <p:cNvPr id="19" name="TextBox 18"/>
           <p:cNvSpPr txBox="1"/>
           <p:nvPr/>
         </p:nvSpPr>
